--- a/dist/초3/사회·역사/공동체와교류/초3_사회·역사_공동체와교류_01_다양한가족.pptx
+++ b/dist/초3/사회·역사/공동체와교류/초3_사회·역사_공동체와교류_01_다양한가족.pptx
@@ -120,13 +120,13 @@
   <p:extLst>
     <p:ext uri="{521415D9-36F7-43E2-AB2F-B90AF26B5E84}">
       <p14:sectionLst xmlns:p14="http://schemas.microsoft.com/office/powerpoint/2010/main">
-        <p14:section name="도입" id="{4a8513e4-ef1a-4799-179e-37b373354b4e}">
+        <p14:section name="도입" id="{16058bc1-61a5-4ef5-ab37-cfdd6783c639}">
           <p14:sldIdLst>
             <p14:sldId id="256"/>
             <p14:sldId id="257"/>
           </p14:sldIdLst>
         </p14:section>
-        <p14:section name="개념" id="{39bca0ff-d9fe-c785-044e-0de340c77a1f}">
+        <p14:section name="개념" id="{dac1d5ec-d45c-14c0-4152-a27fa1983e78}">
           <p14:sldIdLst>
             <p14:sldId id="258"/>
             <p14:sldId id="259"/>
@@ -134,32 +134,32 @@
             <p14:sldId id="263"/>
           </p14:sldIdLst>
         </p14:section>
-        <p14:section name="연습" id="{16a9c676-714e-1282-087b-5073c8237cdd}">
+        <p14:section name="연습" id="{6c82c103-efdb-dece-f7ed-b85294f7dccf}">
           <p14:sldIdLst>
             <p14:sldId id="261"/>
             <p14:sldId id="262"/>
             <p14:sldId id="264"/>
           </p14:sldIdLst>
         </p14:section>
-        <p14:section name="개념" id="{456de739-8eba-c6cc-9b1c-bef66f907e6c}">
+        <p14:section name="개념" id="{3a0839b1-d246-a288-6782-74d4a920c2ce}">
           <p14:sldIdLst/>
         </p14:section>
-        <p14:section name="연습" id="{5faaa676-66d5-803f-7318-81a423e47bbf}">
+        <p14:section name="연습" id="{af048a06-dbef-e4dc-f9c3-0b12860aaaa8}">
           <p14:sldIdLst/>
         </p14:section>
-        <p14:section name="확인" id="{01eec8d9-405e-87c1-123e-c5aea965899e}">
+        <p14:section name="확인" id="{45bf948e-ddd9-7cbf-e9c2-c5e90189f10a}">
           <p14:sldIdLst>
             <p14:sldId id="265"/>
             <p14:sldId id="266"/>
             <p14:sldId id="267"/>
           </p14:sldIdLst>
         </p14:section>
-        <p14:section name="정리" id="{340dcafe-f129-d469-f40f-5254ea9a0e95}">
+        <p14:section name="정리" id="{1a27c021-540a-aad8-a310-5f143465f99a}">
           <p14:sldIdLst>
             <p14:sldId id="268"/>
           </p14:sldIdLst>
         </p14:section>
-        <p14:section name="보충" id="{5cd1ea52-c9cb-e9f2-e606-8f91d00f89f7}">
+        <p14:section name="보충" id="{d248266d-f7a9-a28e-f20f-32fc3ddbc597}">
           <p14:sldIdLst>
             <p14:sldId id="269"/>
           </p14:sldIdLst>

--- a/dist/초3/사회·역사/공동체와교류/초3_사회·역사_공동체와교류_01_다양한가족.pptx
+++ b/dist/초3/사회·역사/공동체와교류/초3_사회·역사_공동체와교류_01_다양한가족.pptx
@@ -120,13 +120,13 @@
   <p:extLst>
     <p:ext uri="{521415D9-36F7-43E2-AB2F-B90AF26B5E84}">
       <p14:sectionLst xmlns:p14="http://schemas.microsoft.com/office/powerpoint/2010/main">
-        <p14:section name="도입" id="{16058bc1-61a5-4ef5-ab37-cfdd6783c639}">
+        <p14:section name="도입" id="{760f9aad-2b29-1a51-335c-c2e5ba840ce3}">
           <p14:sldIdLst>
             <p14:sldId id="256"/>
             <p14:sldId id="257"/>
           </p14:sldIdLst>
         </p14:section>
-        <p14:section name="개념" id="{dac1d5ec-d45c-14c0-4152-a27fa1983e78}">
+        <p14:section name="개념" id="{d40809fd-bdf0-1f99-dc76-1ea535ed8272}">
           <p14:sldIdLst>
             <p14:sldId id="258"/>
             <p14:sldId id="259"/>
@@ -134,32 +134,32 @@
             <p14:sldId id="263"/>
           </p14:sldIdLst>
         </p14:section>
-        <p14:section name="연습" id="{6c82c103-efdb-dece-f7ed-b85294f7dccf}">
+        <p14:section name="연습" id="{2fad0bf7-bd5f-b71c-a69b-3404d2656d26}">
           <p14:sldIdLst>
             <p14:sldId id="261"/>
             <p14:sldId id="262"/>
             <p14:sldId id="264"/>
           </p14:sldIdLst>
         </p14:section>
-        <p14:section name="개념" id="{3a0839b1-d246-a288-6782-74d4a920c2ce}">
+        <p14:section name="개념" id="{eabb60ad-2a4d-5179-d7a0-ca8ce291e5ca}">
           <p14:sldIdLst/>
         </p14:section>
-        <p14:section name="연습" id="{af048a06-dbef-e4dc-f9c3-0b12860aaaa8}">
+        <p14:section name="연습" id="{e6fae947-cfe8-2ff6-3100-25d460bc338b}">
           <p14:sldIdLst/>
         </p14:section>
-        <p14:section name="확인" id="{45bf948e-ddd9-7cbf-e9c2-c5e90189f10a}">
+        <p14:section name="확인" id="{0004f648-9118-11c9-99c3-50765d4f3585}">
           <p14:sldIdLst>
             <p14:sldId id="265"/>
             <p14:sldId id="266"/>
             <p14:sldId id="267"/>
           </p14:sldIdLst>
         </p14:section>
-        <p14:section name="정리" id="{1a27c021-540a-aad8-a310-5f143465f99a}">
+        <p14:section name="정리" id="{a3a17423-732a-d7b0-8118-39231833529c}">
           <p14:sldIdLst>
             <p14:sldId id="268"/>
           </p14:sldIdLst>
         </p14:section>
-        <p14:section name="보충" id="{d248266d-f7a9-a28e-f20f-32fc3ddbc597}">
+        <p14:section name="보충" id="{88f61925-a622-a676-39cd-97d0f93cc3c1}">
           <p14:sldIdLst>
             <p14:sldId id="269"/>
           </p14:sldIdLst>
@@ -1085,7 +1085,7 @@
 막히면
 - 부모가 먼저 “엄마(아빠)는 네가 아플 때 약을 챙겨 줬지.”처럼 예를 들어 줍니다.
 주의
-- 이 차시는 계획상 앞 차시가 없습니다. 보충 뒤에도 어려우면 며칠 동안 저녁마다 ‘오늘 가족이 서로 도운 일’을 하나씩 이야기한 뒤 S02부터 다시 시작합니다.
+- 보충 뒤에도 어려우면 며칠 동안 저녁마다 ‘오늘 가족이 서로 도운 일’을 하나씩 이야기한 뒤 S02부터 다시 시작합니다.
 - 보충이 오래 걸리면 오늘은 여기까지 하고 다음 날 S02부터 다시 시작합니다.</a:t>
             </a:r>
             <a:endParaRPr lang="en-US" dirty="0"/>
@@ -1185,7 +1185,7 @@
 - ② “신발을 정리해요.” “동생이랑 놀아 줘요.”
 막히면
 - 오늘 아침부터 지금까지 있었던 일을 차례로 떠올리게 하고 “그때 누가 도와줬어?”라고 묻습니다.
-- 돌보는 일을 하나도 말하지 못하면 S14(보충)를 먼저 합니다. 이 차시는 계획상 앞 차시가 없습니다(2학년 ‘서로 다른 생활’과 가까운 내용입니다).
+- 돌보는 일을 하나도 말하지 못하면 S14(보충)를 먼저 합니다. 앞 차시는 2학년 ‘서로 다른 생활’입니다.
 주의
 - 아이에게 가족 사정을 말하라고 하지 않습니다. 우리 가족 이야기는 아이가 말하고 싶은 만큼만 하고, 함께 사는 어른(친척, 위탁 부모 등) 누구든 ‘가족’으로 말해도 됩니다.</a:t>
             </a:r>
